--- a/public/FlowGuard-pitch-zh.pptx
+++ b/public/FlowGuard-pitch-zh.pptx
@@ -3368,7 +3368,7 @@
                 <a:ea typeface="Microsoft YaHei" pitchFamily="34" charset="-122"/>
                 <a:cs typeface="Microsoft YaHei" pitchFamily="34" charset="-120"/>
               </a:rPr>
-              <a:t>预检 → 供应商核查 → 双人审批 → 执行(MT103 / 钱包)→ 收款方到账回执 → 自动对账,全链路打通。</a:t>
+              <a:t>预检 → 供应商核查 → 双人审批 → 生成付款指令提交持牌机构 → 收款方到账回执 → 自动对账,全链路打通。</a:t>
             </a:r>
             <a:endParaRPr lang="en-US" sz="1300" dirty="0"/>
           </a:p>
@@ -5198,7 +5198,7 @@
                 <a:ea typeface="Microsoft YaHei" pitchFamily="34" charset="-122"/>
                 <a:cs typeface="Microsoft YaHei" pitchFamily="34" charset="-120"/>
               </a:rPr>
-              <a:t>接入真实的稳定币与本地法币付款服务商。</a:t>
+              <a:t>对接持牌机构(银行 / PSP;境外结算由境外持牌机构完成)。纯软件定位:不持牌、不经手资金、不做加密货币转账。</a:t>
             </a:r>
             <a:endParaRPr lang="en-US" sz="1300" dirty="0"/>
           </a:p>
@@ -5303,7 +5303,7 @@
                 <a:ea typeface="Microsoft YaHei" pitchFamily="34" charset="-122"/>
                 <a:cs typeface="Microsoft YaHei" pitchFamily="34" charset="-120"/>
               </a:rPr>
-              <a:t>链上托管</a:t>
+              <a:t>更深对账</a:t>
             </a:r>
             <a:endParaRPr lang="en-US" sz="1600" dirty="0"/>
           </a:p>
@@ -5342,7 +5342,7 @@
                 <a:ea typeface="Microsoft YaHei" pitchFamily="34" charset="-122"/>
                 <a:cs typeface="Microsoft YaHei" pitchFamily="34" charset="-120"/>
               </a:rPr>
-              <a:t>把托管持久化到后端,并在真实链上结算。</a:t>
+              <a:t>只读接入 ERP/财务系统,打通付款 → 对账 → 入账闭环。资金结算始终由持牌机构完成。</a:t>
             </a:r>
             <a:endParaRPr lang="en-US" sz="1300" dirty="0"/>
           </a:p>
